--- a/system/wk08poster.pptx
+++ b/system/wk08poster.pptx
@@ -236,7 +236,7 @@
           <a:p>
             <a:fld id="{8DAC81C5-AE7A-1044-93C2-6BFF0DD7BC2B}" type="datetimeFigureOut">
               <a:rPr lang="en-US" smtClean="0"/>
-              <a:t>12/3/2025</a:t>
+              <a:t>3/9/2026</a:t>
             </a:fld>
             <a:endParaRPr lang="en-US"/>
           </a:p>
@@ -402,7 +402,7 @@
           <a:p>
             <a:fld id="{8CBB8FA7-5BDC-BF4F-AE27-E2122A3D7D4C}" type="datetimeFigureOut">
               <a:rPr lang="en-US" smtClean="0"/>
-              <a:t>12/3/2025</a:t>
+              <a:t>3/9/2026</a:t>
             </a:fld>
             <a:endParaRPr lang="en-US"/>
           </a:p>
@@ -1195,7 +1195,7 @@
                 <a:latin typeface="ITC Franklin Gothic Std Dm Cd"/>
                 <a:cs typeface="ITC Franklin Gothic Std Dm Cd"/>
               </a:rPr>
-              <a:t>PROJECT TITLE</a:t>
+              <a:t>SiteSync – Job Management System </a:t>
             </a:r>
           </a:p>
           <a:p>
@@ -1207,7 +1207,7 @@
                 <a:latin typeface="ITC Franklin Gothic Std Bk Cd"/>
                 <a:cs typeface="ITC Franklin Gothic Std Bk Cd"/>
               </a:rPr>
-              <a:t>Presenter Names, Program</a:t>
+              <a:t>Tyler Meira, Anthony Mancia, Ngoc Le, Amos Sadiq,   Computer Engineering Technology </a:t>
             </a:r>
           </a:p>
         </p:txBody>
@@ -1242,7 +1242,7 @@
           </a:ln>
           <a:extLst>
             <a:ext uri="{91240B29-F687-4f45-9708-019B960494DF}">
-              <a14:hiddenLine xmlns:a14="http://schemas.microsoft.com/office/drawing/2010/main" xmlns="" w="9525">
+              <a14:hiddenLine xmlns="" xmlns:a14="http://schemas.microsoft.com/office/drawing/2010/main" w="9525">
                 <a:solidFill>
                   <a:srgbClr val="000000"/>
                 </a:solidFill>
@@ -1322,7 +1322,7 @@
           </a:ln>
           <a:extLst>
             <a:ext uri="{91240B29-F687-4f45-9708-019B960494DF}">
-              <a14:hiddenLine xmlns:a14="http://schemas.microsoft.com/office/drawing/2010/main" xmlns="" w="9525">
+              <a14:hiddenLine xmlns="" xmlns:a14="http://schemas.microsoft.com/office/drawing/2010/main" w="9525">
                 <a:solidFill>
                   <a:srgbClr val="000000"/>
                 </a:solidFill>
@@ -1354,20 +1354,18 @@
             </a:r>
           </a:p>
           <a:p>
-            <a:endParaRPr lang="en-US" sz="2800" dirty="0">
+            <a:r>
+              <a:rPr lang="en-US" sz="4400" b="0" i="0" dirty="0">
+                <a:solidFill>
+                  <a:srgbClr val="1F2328"/>
+                </a:solidFill>
+                <a:effectLst/>
+                <a:latin typeface="-apple-system"/>
+              </a:rPr>
+              <a:t>SiteSync is a time management system mainly targeted towards construction sites, warehouses or residential jobsites, with portability in mind. Our app will also help connect employers and employees, while helping them maintain an open line of communication throughout the job process.</a:t>
+            </a:r>
+            <a:endParaRPr lang="en-US" sz="4400" dirty="0">
               <a:latin typeface="ITC Franklin Gothic Std Bk Cd"/>
-            </a:endParaRPr>
-          </a:p>
-          <a:p>
-            <a:r>
-              <a:rPr lang="en-US" sz="2800" dirty="0">
-                <a:latin typeface="ITC Franklin Gothic Std Bk Cd"/>
-              </a:rPr>
-              <a:t>From Proposal.</a:t>
-            </a:r>
-            <a:endParaRPr lang="en-US" sz="2800" dirty="0">
-              <a:latin typeface="Georgia" charset="0"/>
-              <a:cs typeface="Georgia" charset="0"/>
             </a:endParaRPr>
           </a:p>
         </p:txBody>
@@ -1402,7 +1400,7 @@
           </a:ln>
           <a:extLst>
             <a:ext uri="{91240B29-F687-4f45-9708-019B960494DF}">
-              <a14:hiddenLine xmlns:a14="http://schemas.microsoft.com/office/drawing/2010/main" xmlns="" w="9525">
+              <a14:hiddenLine xmlns="" xmlns:a14="http://schemas.microsoft.com/office/drawing/2010/main" w="9525">
                 <a:solidFill>
                   <a:srgbClr val="000000"/>
                 </a:solidFill>
@@ -1482,7 +1480,7 @@
           </a:ln>
           <a:extLst>
             <a:ext uri="{91240B29-F687-4f45-9708-019B960494DF}">
-              <a14:hiddenLine xmlns:a14="http://schemas.microsoft.com/office/drawing/2010/main" xmlns="" w="9525">
+              <a14:hiddenLine xmlns="" xmlns:a14="http://schemas.microsoft.com/office/drawing/2010/main" w="9525">
                 <a:solidFill>
                   <a:srgbClr val="000000"/>
                 </a:solidFill>
@@ -1568,7 +1566,7 @@
           </a:ln>
           <a:extLst>
             <a:ext uri="{91240B29-F687-4f45-9708-019B960494DF}">
-              <a14:hiddenLine xmlns:a14="http://schemas.microsoft.com/office/drawing/2010/main" xmlns="" w="9525">
+              <a14:hiddenLine xmlns="" xmlns:a14="http://schemas.microsoft.com/office/drawing/2010/main" w="9525">
                 <a:solidFill>
                   <a:srgbClr val="000000"/>
                 </a:solidFill>
@@ -1666,7 +1664,7 @@
           </a:ln>
           <a:extLst>
             <a:ext uri="{91240B29-F687-4f45-9708-019B960494DF}">
-              <a14:hiddenLine xmlns:a14="http://schemas.microsoft.com/office/drawing/2010/main" xmlns="" w="9525">
+              <a14:hiddenLine xmlns="" xmlns:a14="http://schemas.microsoft.com/office/drawing/2010/main" w="9525">
                 <a:solidFill>
                   <a:srgbClr val="000000"/>
                 </a:solidFill>

--- a/system/wk08poster.pptx
+++ b/system/wk08poster.pptx
@@ -1242,7 +1242,7 @@
           </a:ln>
           <a:extLst>
             <a:ext uri="{91240B29-F687-4f45-9708-019B960494DF}">
-              <a14:hiddenLine xmlns="" xmlns:a14="http://schemas.microsoft.com/office/drawing/2010/main" w="9525">
+              <a14:hiddenLine xmlns:a14="http://schemas.microsoft.com/office/drawing/2010/main" xmlns="" w="9525">
                 <a:solidFill>
                   <a:srgbClr val="000000"/>
                 </a:solidFill>
@@ -1322,7 +1322,7 @@
           </a:ln>
           <a:extLst>
             <a:ext uri="{91240B29-F687-4f45-9708-019B960494DF}">
-              <a14:hiddenLine xmlns="" xmlns:a14="http://schemas.microsoft.com/office/drawing/2010/main" w="9525">
+              <a14:hiddenLine xmlns:a14="http://schemas.microsoft.com/office/drawing/2010/main" xmlns="" w="9525">
                 <a:solidFill>
                   <a:srgbClr val="000000"/>
                 </a:solidFill>
@@ -1400,7 +1400,7 @@
           </a:ln>
           <a:extLst>
             <a:ext uri="{91240B29-F687-4f45-9708-019B960494DF}">
-              <a14:hiddenLine xmlns="" xmlns:a14="http://schemas.microsoft.com/office/drawing/2010/main" w="9525">
+              <a14:hiddenLine xmlns:a14="http://schemas.microsoft.com/office/drawing/2010/main" xmlns="" w="9525">
                 <a:solidFill>
                   <a:srgbClr val="000000"/>
                 </a:solidFill>
@@ -1434,19 +1434,59 @@
           <a:p>
             <a:endParaRPr lang="en-US" sz="2800" dirty="0">
               <a:latin typeface="ITC Franklin Gothic Std Bk Cd"/>
-            </a:endParaRPr>
-          </a:p>
-          <a:p>
-            <a:r>
-              <a:rPr lang="en-US" sz="2800" dirty="0">
-                <a:latin typeface="ITC Franklin Gothic Std Bk Cd"/>
-              </a:rPr>
-              <a:t>From Hardware Reports.</a:t>
-            </a:r>
-            <a:endParaRPr lang="en-US" sz="2800" dirty="0">
-              <a:latin typeface="Georgia" charset="0"/>
               <a:cs typeface="Georgia" charset="0"/>
             </a:endParaRPr>
+          </a:p>
+          <a:p>
+            <a:r>
+              <a:rPr lang="en-US" sz="4400" dirty="0">
+                <a:latin typeface="-apple-system"/>
+                <a:cs typeface="Georgia" charset="0"/>
+              </a:rPr>
+              <a:t>We combine cases with two </a:t>
+            </a:r>
+            <a:r>
+              <a:rPr lang="en-US" sz="4400" dirty="0" err="1">
+                <a:latin typeface="-apple-system"/>
+                <a:cs typeface="Georgia" charset="0"/>
+              </a:rPr>
+              <a:t>pcbs</a:t>
+            </a:r>
+            <a:r>
+              <a:rPr lang="en-US" sz="4400" dirty="0">
+                <a:latin typeface="-apple-system"/>
+                <a:cs typeface="Georgia" charset="0"/>
+              </a:rPr>
+              <a:t> stacked on top of each other, we </a:t>
+            </a:r>
+            <a:r>
+              <a:rPr lang="en-US" sz="4400" dirty="0" err="1">
+                <a:latin typeface="-apple-system"/>
+                <a:cs typeface="Georgia" charset="0"/>
+              </a:rPr>
+              <a:t>sordered</a:t>
+            </a:r>
+            <a:r>
+              <a:rPr lang="en-US" sz="4400" dirty="0">
+                <a:latin typeface="-apple-system"/>
+                <a:cs typeface="Georgia" charset="0"/>
+              </a:rPr>
+              <a:t> 8 pin headers on each </a:t>
+            </a:r>
+            <a:r>
+              <a:rPr lang="en-US" sz="4400" dirty="0" err="1">
+                <a:latin typeface="-apple-system"/>
+                <a:cs typeface="Georgia" charset="0"/>
+              </a:rPr>
+              <a:t>pcb</a:t>
+            </a:r>
+            <a:r>
+              <a:rPr lang="en-US" sz="4400" dirty="0">
+                <a:latin typeface="-apple-system"/>
+                <a:cs typeface="Georgia" charset="0"/>
+              </a:rPr>
+              <a:t>.</a:t>
+            </a:r>
           </a:p>
         </p:txBody>
       </p:sp>
@@ -1480,7 +1520,7 @@
           </a:ln>
           <a:extLst>
             <a:ext uri="{91240B29-F687-4f45-9708-019B960494DF}">
-              <a14:hiddenLine xmlns="" xmlns:a14="http://schemas.microsoft.com/office/drawing/2010/main" w="9525">
+              <a14:hiddenLine xmlns:a14="http://schemas.microsoft.com/office/drawing/2010/main" xmlns="" w="9525">
                 <a:solidFill>
                   <a:srgbClr val="000000"/>
                 </a:solidFill>
@@ -1512,27 +1552,18 @@
             </a:r>
           </a:p>
           <a:p>
-            <a:endParaRPr lang="en-US" sz="2800" dirty="0">
-              <a:latin typeface="ITC Franklin Gothic Std Bk Cd"/>
-            </a:endParaRPr>
-          </a:p>
-          <a:p>
-            <a:r>
-              <a:rPr lang="en-US" sz="2800" dirty="0">
+            <a:pPr>
+              <a:spcBef>
+                <a:spcPct val="50000"/>
+              </a:spcBef>
+            </a:pPr>
+            <a:r>
+              <a:rPr lang="en-US" sz="4000" dirty="0">
                 <a:latin typeface="ITC Franklin Gothic Std Bk Cd"/>
+                <a:cs typeface="ITC Franklin Gothic Std Bk Cd"/>
               </a:rPr>
-              <a:t>From Mobile </a:t>
-            </a:r>
-            <a:r>
-              <a:rPr lang="en-US" sz="2800">
-                <a:latin typeface="ITC Franklin Gothic Std Bk Cd"/>
-              </a:rPr>
-              <a:t>Deliverables.</a:t>
-            </a:r>
-            <a:endParaRPr lang="en-US" sz="2800" dirty="0">
-              <a:latin typeface="Georgia" charset="0"/>
-              <a:cs typeface="Georgia" charset="0"/>
-            </a:endParaRPr>
+              <a:t>Employers can see when the employees clock in and clock out in the app. Employers also can add more jobs in the job board. Employee can clock in and clock out using fingerprint scanner.</a:t>
+            </a:r>
           </a:p>
         </p:txBody>
       </p:sp>
@@ -1566,7 +1597,7 @@
           </a:ln>
           <a:extLst>
             <a:ext uri="{91240B29-F687-4f45-9708-019B960494DF}">
-              <a14:hiddenLine xmlns="" xmlns:a14="http://schemas.microsoft.com/office/drawing/2010/main" w="9525">
+              <a14:hiddenLine xmlns:a14="http://schemas.microsoft.com/office/drawing/2010/main" xmlns="" w="9525">
                 <a:solidFill>
                   <a:srgbClr val="000000"/>
                 </a:solidFill>
@@ -1603,30 +1634,6 @@
             </a:endParaRPr>
           </a:p>
           <a:p>
-            <a:r>
-              <a:rPr lang="en-US" sz="2800" dirty="0">
-                <a:latin typeface="ITC Franklin Gothic Std Bk Cd"/>
-              </a:rPr>
-              <a:t>This poster is 48</a:t>
-            </a:r>
-            <a:r>
-              <a:rPr lang="ja-JP" altLang="en-US" sz="2800" dirty="0">
-                <a:latin typeface="ITC Franklin Gothic Std Bk Cd"/>
-              </a:rPr>
-              <a:t>”</a:t>
-            </a:r>
-            <a:r>
-              <a:rPr lang="en-US" altLang="ja-JP" sz="2800" dirty="0">
-                <a:latin typeface="ITC Franklin Gothic Std Bk Cd"/>
-              </a:rPr>
-              <a:t> x 36</a:t>
-            </a:r>
-            <a:r>
-              <a:rPr lang="ja-JP" altLang="en-US" sz="2800" dirty="0">
-                <a:latin typeface="ITC Franklin Gothic Std Bk Cd"/>
-              </a:rPr>
-              <a:t>”</a:t>
-            </a:r>
             <a:endParaRPr lang="en-US" sz="2800" dirty="0">
               <a:latin typeface="Georgia" charset="0"/>
               <a:cs typeface="Georgia" charset="0"/>
@@ -1664,7 +1671,7 @@
           </a:ln>
           <a:extLst>
             <a:ext uri="{91240B29-F687-4f45-9708-019B960494DF}">
-              <a14:hiddenLine xmlns="" xmlns:a14="http://schemas.microsoft.com/office/drawing/2010/main" w="9525">
+              <a14:hiddenLine xmlns:a14="http://schemas.microsoft.com/office/drawing/2010/main" xmlns="" w="9525">
                 <a:solidFill>
                   <a:srgbClr val="000000"/>
                 </a:solidFill>
@@ -1801,6 +1808,36 @@
           </a:p>
         </p:txBody>
       </p:sp>
+      <p:pic>
+        <p:nvPicPr>
+          <p:cNvPr id="11" name="Picture 10">
+            <a:extLst>
+              <a:ext uri="{FF2B5EF4-FFF2-40B4-BE49-F238E27FC236}">
+                <a16:creationId xmlns:a16="http://schemas.microsoft.com/office/drawing/2014/main" id="{C2E91003-5BA7-0EB1-F526-6265D08FB5B1}"/>
+              </a:ext>
+            </a:extLst>
+          </p:cNvPr>
+          <p:cNvPicPr>
+            <a:picLocks noChangeAspect="1"/>
+          </p:cNvPicPr>
+          <p:nvPr/>
+        </p:nvPicPr>
+        <p:blipFill>
+          <a:blip r:embed="rId3"/>
+          <a:stretch>
+            <a:fillRect/>
+          </a:stretch>
+        </p:blipFill>
+        <p:spPr>
+          <a:xfrm>
+            <a:off x="33107199" y="5383851"/>
+            <a:ext cx="9423627" cy="10291577"/>
+          </a:xfrm>
+          <a:prstGeom prst="rect">
+            <a:avLst/>
+          </a:prstGeom>
+        </p:spPr>
+      </p:pic>
     </p:spTree>
     <p:extLst>
       <p:ext uri="{BB962C8B-B14F-4D97-AF65-F5344CB8AC3E}">

--- a/system/wk08poster.pptx
+++ b/system/wk08poster.pptx
@@ -1228,7 +1228,7 @@
         </p:nvSpPr>
         <p:spPr bwMode="auto">
           <a:xfrm>
-            <a:off x="1143000" y="20421600"/>
+            <a:off x="1143000" y="20514230"/>
             <a:ext cx="9829800" cy="11506200"/>
           </a:xfrm>
           <a:prstGeom prst="rect">
@@ -1242,7 +1242,7 @@
           </a:ln>
           <a:extLst>
             <a:ext uri="{91240B29-F687-4f45-9708-019B960494DF}">
-              <a14:hiddenLine xmlns:a14="http://schemas.microsoft.com/office/drawing/2010/main" xmlns="" w="9525">
+              <a14:hiddenLine xmlns="" xmlns:a14="http://schemas.microsoft.com/office/drawing/2010/main" w="9525">
                 <a:solidFill>
                   <a:srgbClr val="000000"/>
                 </a:solidFill>
@@ -1274,19 +1274,123 @@
             </a:r>
           </a:p>
           <a:p>
+            <a:pPr>
+              <a:spcBef>
+                <a:spcPct val="50000"/>
+              </a:spcBef>
+            </a:pPr>
+            <a:endParaRPr lang="en-US" sz="4000" dirty="0">
+              <a:solidFill>
+                <a:srgbClr val="008EC8"/>
+              </a:solidFill>
+              <a:latin typeface="ITC Franklin Gothic Std Bk Cd"/>
+              <a:cs typeface="ITC Franklin Gothic Std Bk Cd"/>
+            </a:endParaRPr>
+          </a:p>
+          <a:p>
+            <a:pPr>
+              <a:spcBef>
+                <a:spcPct val="50000"/>
+              </a:spcBef>
+            </a:pPr>
+            <a:endParaRPr lang="en-US" sz="4000" dirty="0">
+              <a:solidFill>
+                <a:srgbClr val="008EC8"/>
+              </a:solidFill>
+              <a:latin typeface="ITC Franklin Gothic Std Bk Cd"/>
+              <a:cs typeface="ITC Franklin Gothic Std Bk Cd"/>
+            </a:endParaRPr>
+          </a:p>
+          <a:p>
+            <a:pPr>
+              <a:spcBef>
+                <a:spcPct val="50000"/>
+              </a:spcBef>
+            </a:pPr>
+            <a:endParaRPr lang="en-US" sz="4000" dirty="0">
+              <a:solidFill>
+                <a:srgbClr val="008EC8"/>
+              </a:solidFill>
+              <a:latin typeface="ITC Franklin Gothic Std Bk Cd"/>
+              <a:cs typeface="ITC Franklin Gothic Std Bk Cd"/>
+            </a:endParaRPr>
+          </a:p>
+          <a:p>
+            <a:pPr>
+              <a:spcBef>
+                <a:spcPct val="50000"/>
+              </a:spcBef>
+            </a:pPr>
+            <a:endParaRPr lang="en-US" sz="4000" dirty="0">
+              <a:solidFill>
+                <a:srgbClr val="008EC8"/>
+              </a:solidFill>
+              <a:latin typeface="ITC Franklin Gothic Std Bk Cd"/>
+              <a:cs typeface="ITC Franklin Gothic Std Bk Cd"/>
+            </a:endParaRPr>
+          </a:p>
+          <a:p>
+            <a:pPr>
+              <a:spcBef>
+                <a:spcPct val="50000"/>
+              </a:spcBef>
+            </a:pPr>
+            <a:endParaRPr lang="en-US" sz="4000" dirty="0">
+              <a:solidFill>
+                <a:srgbClr val="008EC8"/>
+              </a:solidFill>
+              <a:latin typeface="ITC Franklin Gothic Std Bk Cd"/>
+              <a:cs typeface="ITC Franklin Gothic Std Bk Cd"/>
+            </a:endParaRPr>
+          </a:p>
+          <a:p>
+            <a:pPr>
+              <a:spcBef>
+                <a:spcPct val="50000"/>
+              </a:spcBef>
+            </a:pPr>
+            <a:r>
+              <a:rPr lang="en-US" sz="4000" dirty="0">
+                <a:latin typeface="ITC Franklin Gothic Std Bk Cd"/>
+                <a:cs typeface="ITC Franklin Gothic Std Bk Cd"/>
+              </a:rPr>
+              <a:t>We have ordered 3D cut for our case. The pi is mounted to the bottom of the case. Buzzer is mounted to the side and </a:t>
+            </a:r>
+            <a:r>
+              <a:rPr lang="en-US" sz="4000" dirty="0" err="1">
+                <a:latin typeface="ITC Franklin Gothic Std Bk Cd"/>
+                <a:cs typeface="ITC Franklin Gothic Std Bk Cd"/>
+              </a:rPr>
+              <a:t>Oled</a:t>
+            </a:r>
+            <a:r>
+              <a:rPr lang="en-US" sz="4000" dirty="0">
+                <a:latin typeface="ITC Franklin Gothic Std Bk Cd"/>
+                <a:cs typeface="ITC Franklin Gothic Std Bk Cd"/>
+              </a:rPr>
+              <a:t> display is mounted above the pi. The case is taller than usual because we need two </a:t>
+            </a:r>
+            <a:r>
+              <a:rPr lang="en-US" sz="4000" dirty="0" err="1">
+                <a:latin typeface="ITC Franklin Gothic Std Bk Cd"/>
+                <a:cs typeface="ITC Franklin Gothic Std Bk Cd"/>
+              </a:rPr>
+              <a:t>pcbs</a:t>
+            </a:r>
+            <a:r>
+              <a:rPr lang="en-US" sz="4000" dirty="0">
+                <a:latin typeface="ITC Franklin Gothic Std Bk Cd"/>
+                <a:cs typeface="ITC Franklin Gothic Std Bk Cd"/>
+              </a:rPr>
+              <a:t> and pi to complete our project.</a:t>
+            </a:r>
             <a:endParaRPr lang="en-US" sz="2800" dirty="0">
               <a:latin typeface="ITC Franklin Gothic Std Bk Cd"/>
             </a:endParaRPr>
           </a:p>
           <a:p>
-            <a:r>
-              <a:rPr lang="en-US" sz="2800" dirty="0">
-                <a:latin typeface="ITC Franklin Gothic Std Bk Cd"/>
-              </a:rPr>
-              <a:t>From Report.</a:t>
-            </a:r>
-            <a:endParaRPr lang="en-US" sz="2800" dirty="0">
-              <a:latin typeface="Georgia" charset="0"/>
+            <a:endParaRPr lang="en-US" sz="4400" dirty="0">
+              <a:latin typeface="-apple-system"/>
               <a:cs typeface="Georgia" charset="0"/>
             </a:endParaRPr>
           </a:p>
@@ -1322,7 +1426,7 @@
           </a:ln>
           <a:extLst>
             <a:ext uri="{91240B29-F687-4f45-9708-019B960494DF}">
-              <a14:hiddenLine xmlns:a14="http://schemas.microsoft.com/office/drawing/2010/main" xmlns="" w="9525">
+              <a14:hiddenLine xmlns="" xmlns:a14="http://schemas.microsoft.com/office/drawing/2010/main" w="9525">
                 <a:solidFill>
                   <a:srgbClr val="000000"/>
                 </a:solidFill>
@@ -1400,7 +1504,7 @@
           </a:ln>
           <a:extLst>
             <a:ext uri="{91240B29-F687-4f45-9708-019B960494DF}">
-              <a14:hiddenLine xmlns:a14="http://schemas.microsoft.com/office/drawing/2010/main" xmlns="" w="9525">
+              <a14:hiddenLine xmlns="" xmlns:a14="http://schemas.microsoft.com/office/drawing/2010/main" w="9525">
                 <a:solidFill>
                   <a:srgbClr val="000000"/>
                 </a:solidFill>
@@ -1443,35 +1547,44 @@
                 <a:latin typeface="-apple-system"/>
                 <a:cs typeface="Georgia" charset="0"/>
               </a:rPr>
-              <a:t>We combine cases with two </a:t>
+              <a:t>Each of our PCB includes a stacking header, a </a:t>
             </a:r>
             <a:r>
               <a:rPr lang="en-US" sz="4400" dirty="0" err="1">
                 <a:latin typeface="-apple-system"/>
                 <a:cs typeface="Georgia" charset="0"/>
               </a:rPr>
-              <a:t>pcbs</a:t>
+              <a:t>qwicc</a:t>
             </a:r>
             <a:r>
               <a:rPr lang="en-US" sz="4400" dirty="0">
                 <a:latin typeface="-apple-system"/>
                 <a:cs typeface="Georgia" charset="0"/>
               </a:rPr>
-              <a:t> stacked on top of each other, we </a:t>
+              <a:t> connector, two resistors and two LEDS.</a:t>
+            </a:r>
+          </a:p>
+          <a:p>
+            <a:r>
+              <a:rPr lang="en-US" sz="4400" dirty="0">
+                <a:latin typeface="-apple-system"/>
+                <a:cs typeface="Georgia" charset="0"/>
+              </a:rPr>
+              <a:t>We have decided to use two PCBs for our project stacking on top of a pi. One </a:t>
             </a:r>
             <a:r>
               <a:rPr lang="en-US" sz="4400" dirty="0" err="1">
                 <a:latin typeface="-apple-system"/>
                 <a:cs typeface="Georgia" charset="0"/>
               </a:rPr>
-              <a:t>sordered</a:t>
+              <a:t>pcb</a:t>
             </a:r>
             <a:r>
               <a:rPr lang="en-US" sz="4400" dirty="0">
                 <a:latin typeface="-apple-system"/>
                 <a:cs typeface="Georgia" charset="0"/>
               </a:rPr>
-              <a:t> 8 pin headers on each </a:t>
+              <a:t> will be attached with buzzer and fingerprint, the other </a:t>
             </a:r>
             <a:r>
               <a:rPr lang="en-US" sz="4400" dirty="0" err="1">
@@ -1485,8 +1598,34 @@
                 <a:latin typeface="-apple-system"/>
                 <a:cs typeface="Georgia" charset="0"/>
               </a:rPr>
-              <a:t>.</a:t>
-            </a:r>
+              <a:t> will be attached with </a:t>
+            </a:r>
+            <a:r>
+              <a:rPr lang="en-US" sz="4400" dirty="0" err="1">
+                <a:latin typeface="-apple-system"/>
+                <a:cs typeface="Georgia" charset="0"/>
+              </a:rPr>
+              <a:t>Oled</a:t>
+            </a:r>
+            <a:r>
+              <a:rPr lang="en-US" sz="4400" dirty="0">
+                <a:latin typeface="-apple-system"/>
+                <a:cs typeface="Georgia" charset="0"/>
+              </a:rPr>
+              <a:t> display and servo.</a:t>
+            </a:r>
+          </a:p>
+          <a:p>
+            <a:endParaRPr lang="en-US" sz="4400" dirty="0">
+              <a:latin typeface="-apple-system"/>
+              <a:cs typeface="Georgia" charset="0"/>
+            </a:endParaRPr>
+          </a:p>
+          <a:p>
+            <a:endParaRPr lang="en-US" sz="4400" dirty="0">
+              <a:latin typeface="-apple-system"/>
+              <a:cs typeface="Georgia" charset="0"/>
+            </a:endParaRPr>
           </a:p>
         </p:txBody>
       </p:sp>
@@ -1520,7 +1659,7 @@
           </a:ln>
           <a:extLst>
             <a:ext uri="{91240B29-F687-4f45-9708-019B960494DF}">
-              <a14:hiddenLine xmlns:a14="http://schemas.microsoft.com/office/drawing/2010/main" xmlns="" w="9525">
+              <a14:hiddenLine xmlns="" xmlns:a14="http://schemas.microsoft.com/office/drawing/2010/main" w="9525">
                 <a:solidFill>
                   <a:srgbClr val="000000"/>
                 </a:solidFill>
@@ -1558,11 +1697,92 @@
               </a:spcBef>
             </a:pPr>
             <a:r>
-              <a:rPr lang="en-US" sz="4000" dirty="0">
-                <a:latin typeface="ITC Franklin Gothic Std Bk Cd"/>
+              <a:rPr lang="en-US" sz="4400" dirty="0">
+                <a:latin typeface="-apple-system"/>
                 <a:cs typeface="ITC Franklin Gothic Std Bk Cd"/>
               </a:rPr>
-              <a:t>Employers can see when the employees clock in and clock out in the app. Employers also can add more jobs in the job board. Employee can clock in and clock out using fingerprint scanner.</a:t>
+              <a:t>Employers can see when the employees ‘ </a:t>
+            </a:r>
+            <a:r>
+              <a:rPr lang="en-US" sz="4400" dirty="0" err="1">
+                <a:latin typeface="-apple-system"/>
+                <a:cs typeface="ITC Franklin Gothic Std Bk Cd"/>
+              </a:rPr>
+              <a:t>punchlogs</a:t>
+            </a:r>
+            <a:r>
+              <a:rPr lang="en-US" sz="4400" dirty="0">
+                <a:latin typeface="-apple-system"/>
+                <a:cs typeface="ITC Franklin Gothic Std Bk Cd"/>
+              </a:rPr>
+              <a:t> in the app. Employers also can add more jobs in the job board. Employee can clock in and clock out using fingerprint scanner.</a:t>
+            </a:r>
+          </a:p>
+          <a:p>
+            <a:pPr>
+              <a:spcBef>
+                <a:spcPct val="50000"/>
+              </a:spcBef>
+            </a:pPr>
+            <a:r>
+              <a:rPr lang="en-US" sz="4400" dirty="0">
+                <a:latin typeface="-apple-system"/>
+                <a:cs typeface="ITC Franklin Gothic Std Bk Cd"/>
+              </a:rPr>
+              <a:t>Users are allowed to change their information.</a:t>
+            </a:r>
+          </a:p>
+          <a:p>
+            <a:pPr>
+              <a:spcBef>
+                <a:spcPct val="50000"/>
+              </a:spcBef>
+            </a:pPr>
+            <a:r>
+              <a:rPr lang="en-US" sz="4400" dirty="0">
+                <a:latin typeface="-apple-system"/>
+                <a:cs typeface="ITC Franklin Gothic Std Bk Cd"/>
+              </a:rPr>
+              <a:t>There is help available in the app in case users needs guidance.</a:t>
+            </a:r>
+          </a:p>
+          <a:p>
+            <a:pPr>
+              <a:spcBef>
+                <a:spcPct val="50000"/>
+              </a:spcBef>
+            </a:pPr>
+            <a:r>
+              <a:rPr lang="en-US" sz="4400" dirty="0">
+                <a:latin typeface="-apple-system"/>
+                <a:cs typeface="ITC Franklin Gothic Std Bk Cd"/>
+              </a:rPr>
+              <a:t>Our app has 3 tabs such as home, job and </a:t>
+            </a:r>
+            <a:r>
+              <a:rPr lang="en-US" sz="4400" dirty="0" err="1">
+                <a:latin typeface="-apple-system"/>
+                <a:cs typeface="ITC Franklin Gothic Std Bk Cd"/>
+              </a:rPr>
+              <a:t>punchlogs</a:t>
+            </a:r>
+            <a:endParaRPr lang="en-US" sz="4400" dirty="0">
+              <a:latin typeface="-apple-system"/>
+              <a:cs typeface="ITC Franklin Gothic Std Bk Cd"/>
+            </a:endParaRPr>
+          </a:p>
+          <a:p>
+            <a:pPr>
+              <a:spcBef>
+                <a:spcPct val="50000"/>
+              </a:spcBef>
+            </a:pPr>
+            <a:r>
+              <a:rPr lang="en-US" sz="4400" dirty="0">
+                <a:latin typeface="-apple-system"/>
+                <a:cs typeface="ITC Franklin Gothic Std Bk Cd"/>
+              </a:rPr>
+              <a:t>.</a:t>
             </a:r>
           </a:p>
         </p:txBody>
@@ -1597,7 +1817,7 @@
           </a:ln>
           <a:extLst>
             <a:ext uri="{91240B29-F687-4f45-9708-019B960494DF}">
-              <a14:hiddenLine xmlns:a14="http://schemas.microsoft.com/office/drawing/2010/main" xmlns="" w="9525">
+              <a14:hiddenLine xmlns="" xmlns:a14="http://schemas.microsoft.com/office/drawing/2010/main" w="9525">
                 <a:solidFill>
                   <a:srgbClr val="000000"/>
                 </a:solidFill>
@@ -1657,7 +1877,7 @@
         </p:nvSpPr>
         <p:spPr bwMode="auto">
           <a:xfrm>
-            <a:off x="32904113" y="17069990"/>
+            <a:off x="32701026" y="17069990"/>
             <a:ext cx="9829800" cy="7237810"/>
           </a:xfrm>
           <a:prstGeom prst="rect">
@@ -1671,7 +1891,7 @@
           </a:ln>
           <a:extLst>
             <a:ext uri="{91240B29-F687-4f45-9708-019B960494DF}">
-              <a14:hiddenLine xmlns:a14="http://schemas.microsoft.com/office/drawing/2010/main" xmlns="" w="9525">
+              <a14:hiddenLine xmlns="" xmlns:a14="http://schemas.microsoft.com/office/drawing/2010/main" w="9525">
                 <a:solidFill>
                   <a:srgbClr val="000000"/>
                 </a:solidFill>
@@ -1692,7 +1912,7 @@
               </a:spcBef>
             </a:pPr>
             <a:r>
-              <a:rPr lang="en-US" sz="4000">
+              <a:rPr lang="en-US" sz="4000" dirty="0">
                 <a:solidFill>
                   <a:srgbClr val="008EC8"/>
                 </a:solidFill>
@@ -1701,13 +1921,6 @@
               </a:rPr>
               <a:t>TESTING AND NEXT STEPS</a:t>
             </a:r>
-            <a:endParaRPr lang="en-US" sz="4000" dirty="0">
-              <a:solidFill>
-                <a:srgbClr val="008EC8"/>
-              </a:solidFill>
-              <a:latin typeface="ITC Franklin Gothic Std Bk Cd"/>
-              <a:cs typeface="ITC Franklin Gothic Std Bk Cd"/>
-            </a:endParaRPr>
           </a:p>
           <a:p>
             <a:endParaRPr lang="en-US" sz="2800" dirty="0">
@@ -1716,33 +1929,19 @@
           </a:p>
           <a:p>
             <a:r>
-              <a:rPr lang="en-US" sz="2800" dirty="0">
-                <a:latin typeface="ITC Franklin Gothic Std Bk Cd"/>
-              </a:rPr>
-              <a:t>This poster is 48</a:t>
-            </a:r>
-            <a:r>
-              <a:rPr lang="ja-JP" altLang="en-US" sz="2800" dirty="0">
-                <a:latin typeface="ITC Franklin Gothic Std Bk Cd"/>
-              </a:rPr>
-              <a:t>”</a:t>
-            </a:r>
-            <a:r>
-              <a:rPr lang="en-US" altLang="ja-JP" sz="2800" dirty="0">
-                <a:latin typeface="ITC Franklin Gothic Std Bk Cd"/>
-              </a:rPr>
-              <a:t> x 36</a:t>
-            </a:r>
-            <a:r>
-              <a:rPr lang="ja-JP" altLang="en-US" sz="2800" dirty="0">
-                <a:latin typeface="ITC Franklin Gothic Std Bk Cd"/>
-              </a:rPr>
-              <a:t>”</a:t>
-            </a:r>
-            <a:endParaRPr lang="en-US" sz="2800" dirty="0">
-              <a:latin typeface="Georgia" charset="0"/>
-              <a:cs typeface="Georgia" charset="0"/>
-            </a:endParaRPr>
+              <a:rPr lang="en-US" sz="4400" dirty="0" err="1">
+                <a:latin typeface="-apple-system"/>
+                <a:cs typeface="Georgia" charset="0"/>
+              </a:rPr>
+              <a:t>Alll</a:t>
+            </a:r>
+            <a:r>
+              <a:rPr lang="en-US" sz="4400" dirty="0">
+                <a:latin typeface="-apple-system"/>
+                <a:cs typeface="Georgia" charset="0"/>
+              </a:rPr>
+              <a:t> of our sensors are working properly. Our future goal for now is to test how they work with each other after assembling,</a:t>
+            </a:r>
           </a:p>
         </p:txBody>
       </p:sp>
@@ -1832,6 +2031,96 @@
           <a:xfrm>
             <a:off x="33107199" y="5383851"/>
             <a:ext cx="9423627" cy="10291577"/>
+          </a:xfrm>
+          <a:prstGeom prst="rect">
+            <a:avLst/>
+          </a:prstGeom>
+        </p:spPr>
+      </p:pic>
+      <p:pic>
+        <p:nvPicPr>
+          <p:cNvPr id="12" name="Picture 11">
+            <a:extLst>
+              <a:ext uri="{FF2B5EF4-FFF2-40B4-BE49-F238E27FC236}">
+                <a16:creationId xmlns:a16="http://schemas.microsoft.com/office/drawing/2014/main" id="{E4B3A2DE-99A3-B0CE-CADD-F65C7D2ECA76}"/>
+              </a:ext>
+            </a:extLst>
+          </p:cNvPr>
+          <p:cNvPicPr>
+            <a:picLocks noChangeAspect="1"/>
+          </p:cNvPicPr>
+          <p:nvPr/>
+        </p:nvPicPr>
+        <p:blipFill>
+          <a:blip r:embed="rId4"/>
+          <a:stretch>
+            <a:fillRect/>
+          </a:stretch>
+        </p:blipFill>
+        <p:spPr>
+          <a:xfrm>
+            <a:off x="1360374" y="21396707"/>
+            <a:ext cx="9612426" cy="4863505"/>
+          </a:xfrm>
+          <a:prstGeom prst="rect">
+            <a:avLst/>
+          </a:prstGeom>
+        </p:spPr>
+      </p:pic>
+      <p:pic>
+        <p:nvPicPr>
+          <p:cNvPr id="14" name="Picture 13">
+            <a:extLst>
+              <a:ext uri="{FF2B5EF4-FFF2-40B4-BE49-F238E27FC236}">
+                <a16:creationId xmlns:a16="http://schemas.microsoft.com/office/drawing/2014/main" id="{60BBD813-CC37-C32B-09C8-C52CD1FD7387}"/>
+              </a:ext>
+            </a:extLst>
+          </p:cNvPr>
+          <p:cNvPicPr>
+            <a:picLocks noChangeAspect="1"/>
+          </p:cNvPicPr>
+          <p:nvPr/>
+        </p:nvPicPr>
+        <p:blipFill>
+          <a:blip r:embed="rId5"/>
+          <a:stretch>
+            <a:fillRect/>
+          </a:stretch>
+        </p:blipFill>
+        <p:spPr>
+          <a:xfrm>
+            <a:off x="23412236" y="14293516"/>
+            <a:ext cx="7658527" cy="16884073"/>
+          </a:xfrm>
+          <a:prstGeom prst="rect">
+            <a:avLst/>
+          </a:prstGeom>
+        </p:spPr>
+      </p:pic>
+      <p:pic>
+        <p:nvPicPr>
+          <p:cNvPr id="16" name="Picture 15">
+            <a:extLst>
+              <a:ext uri="{FF2B5EF4-FFF2-40B4-BE49-F238E27FC236}">
+                <a16:creationId xmlns:a16="http://schemas.microsoft.com/office/drawing/2014/main" id="{666620EF-3FFC-C448-88FA-01DF0030C6CD}"/>
+              </a:ext>
+            </a:extLst>
+          </p:cNvPr>
+          <p:cNvPicPr>
+            <a:picLocks noChangeAspect="1"/>
+          </p:cNvPicPr>
+          <p:nvPr/>
+        </p:nvPicPr>
+        <p:blipFill>
+          <a:blip r:embed="rId6"/>
+          <a:stretch>
+            <a:fillRect/>
+          </a:stretch>
+        </p:blipFill>
+        <p:spPr>
+          <a:xfrm>
+            <a:off x="12316815" y="12185346"/>
+            <a:ext cx="8665769" cy="8547708"/>
           </a:xfrm>
           <a:prstGeom prst="rect">
             <a:avLst/>
